--- a/curriculum/unit-2-naming-identity/module-2-2-metric-first-queries.pptx
+++ b/curriculum/unit-2-naming-identity/module-2-2-metric-first-queries.pptx
@@ -2396,7 +2396,7 @@
                 <a:ea typeface="Segoe UI" pitchFamily="34" charset="-122"/>
                 <a:cs typeface="Segoe UI" pitchFamily="34" charset="-120"/>
               </a:rPr>
-              <a:t> in Latest.</a:t>
+              <a:t> with SDv2.</a:t>
             </a:r>
             <a:endParaRPr lang="en-US" sz="2000" dirty="0"/>
           </a:p>
@@ -3993,7 +3993,7 @@
                 <a:ea typeface="Segoe UI" pitchFamily="34" charset="-122"/>
                 <a:cs typeface="Segoe UI" pitchFamily="34" charset="-120"/>
               </a:rPr>
-              <a:t>Classic-detected services</a:t>
+              <a:t>SDv1-detected services</a:t>
             </a:r>
             <a:pPr indent="0" marL="0">
               <a:buNone/>
